--- a/public/fun/pack/pptx/birthdaypro/돌잔치프리미엄_41_성장기록중심_플래티넘아이스.pptx
+++ b/public/fun/pack/pptx/birthdaypro/돌잔치프리미엄_41_성장기록중심_플래티넘아이스.pptx
@@ -112,12 +112,12 @@
   <p:extLst>
     <p:ext uri="{521415D9-36F7-43E2-AB2F-B90AF26B5E84}">
       <p14:sectionLst xmlns:p14="http://schemas.microsoft.com/office/powerpoint/2010/main">
-        <p14:section name="시작" id="{08FB8BEC-91D8-4C5F-BB7E-308ECD9B4FDC}">
+        <p14:section name="시작" id="{892AF70C-6669-457D-9F15-7930BCF44413}">
           <p14:sldIdLst>
             <p14:sldId id="256"/>
           </p14:sldIdLst>
         </p14:section>
-        <p14:section name="본문" id="{E52557BF-07B7-4348-91E7-DEE1EBC99060}">
+        <p14:section name="본문" id="{A191B066-503B-4AC7-AE0C-13AE9E9A2697}">
           <p14:sldIdLst>
             <p14:sldId id="257"/>
             <p14:sldId id="258"/>
@@ -125,7 +125,7 @@
             <p14:sldId id="260"/>
           </p14:sldIdLst>
         </p14:section>
-        <p14:section name="마무리" id="{4661EF44-B55C-41D2-9F97-5F2FF2E79843}">
+        <p14:section name="마무리" id="{A2F1E872-2057-484B-8D07-09B10D10A417}">
           <p14:sldIdLst>
             <p14:sldId id="261"/>
           </p14:sldIdLst>
@@ -1747,7 +1747,7 @@
             </a:lvl1pPr>
           </a:lstStyle>
           <a:p>
-            <a:fld id="{C7F4BEC1-DA80-463D-86FB-C6F5DA9E2035}" type="slidenum">
+            <a:fld id="{25B4E9C5-9E28-4C14-8D95-EB72A6BDFB08}" type="slidenum">
               <a:rPr lang="en-US"/>
               <a:t>‹#›</a:t>
             </a:fld>
@@ -2505,7 +2505,7 @@
             </a:lvl1pPr>
           </a:lstStyle>
           <a:p>
-            <a:fld id="{BAB03029-B591-4E97-9797-17AFA3EBFD6B}" type="slidenum">
+            <a:fld id="{DE8E1717-769C-470C-BFEF-E2865FE1E6AF}" type="slidenum">
               <a:rPr lang="en-US"/>
               <a:t>‹#›</a:t>
             </a:fld>
@@ -3142,7 +3142,7 @@
             </a:lvl1pPr>
           </a:lstStyle>
           <a:p>
-            <a:fld id="{21A7E080-A2BD-40DF-BBA1-E4582E093F86}" type="slidenum">
+            <a:fld id="{25FBA395-687B-4747-A000-C78905CC8433}" type="slidenum">
               <a:rPr lang="en-US"/>
               <a:t>‹#›</a:t>
             </a:fld>
@@ -3981,7 +3981,7 @@
           <a:p>
             <a:r>
               <a:rPr lang="ko-KR"/>
-              <a:t>첫 겨울도 감기 없이 지났습니다</a:t>
+              <a:t>감기 없이 건강하게 지났습니다</a:t>
             </a:r>
           </a:p>
         </p:txBody>
@@ -4003,7 +4003,7 @@
           <a:p>
             <a:r>
               <a:rPr lang="ko-KR"/>
-              <a:t>아기 이름 · 0000. 00. 00</a:t>
+              <a:t>아기 이름 · 날짜 입력</a:t>
             </a:r>
           </a:p>
           <a:p>
@@ -4164,7 +4164,7 @@
           <a:bodyPr/>
           <a:lstStyle/>
           <a:p>
-            <a:fld id="{7E890454-6089-4FF4-8CD9-3547611073B8}" type="slidenum">
+            <a:fld id="{E0B4B85A-15B8-4A86-BC51-7A73502563BF}" type="slidenum">
               <a:rPr lang="en-US"/>
               <a:t>‹#›</a:t>
             </a:fld>
@@ -4764,7 +4764,7 @@
           <a:bodyPr/>
           <a:lstStyle/>
           <a:p>
-            <a:fld id="{F7D2FD5D-7EF5-4CF4-A5F7-53000E8CCC97}" type="slidenum">
+            <a:fld id="{015FE72F-FC3C-4106-96A2-FBCEC9406CE2}" type="slidenum">
               <a:rPr lang="en-US"/>
               <a:t>‹#›</a:t>
             </a:fld>
@@ -5945,7 +5945,7 @@
           <a:bodyPr/>
           <a:lstStyle/>
           <a:p>
-            <a:fld id="{5A72EE08-AC1D-4BD9-9DC4-D24103D26860}" type="slidenum">
+            <a:fld id="{FE83ABAC-2061-4B8B-8A99-7CC793E12ECF}" type="slidenum">
               <a:rPr lang="en-US"/>
               <a:t>‹#›</a:t>
             </a:fld>
@@ -6620,7 +6620,7 @@
           <a:bodyPr/>
           <a:lstStyle/>
           <a:p>
-            <a:fld id="{438F01DE-E336-42AE-8C51-075E8DECC005}" type="slidenum">
+            <a:fld id="{BBC0B018-8EE5-47F2-B1DB-81AE46C5C1B0}" type="slidenum">
               <a:rPr lang="en-US"/>
               <a:t>‹#›</a:t>
             </a:fld>
